--- a/doc/개발환경_설치매뉴얼(MariaDB).pptx
+++ b/doc/개발환경_설치매뉴얼(MariaDB).pptx
@@ -6,8 +6,10 @@
   </p:sldMasterIdLst>
   <p:sldIdLst>
     <p:sldId id="256" r:id="rId2"/>
-    <p:sldId id="257" r:id="rId3"/>
-    <p:sldId id="258" r:id="rId4"/>
+    <p:sldId id="258" r:id="rId3"/>
+    <p:sldId id="259" r:id="rId4"/>
+    <p:sldId id="260" r:id="rId5"/>
+    <p:sldId id="261" r:id="rId6"/>
   </p:sldIdLst>
   <p:sldSz cx="12192000" cy="6858000"/>
   <p:notesSz cx="6858000" cy="9144000"/>
@@ -106,6 +108,11 @@
       </a:defRPr>
     </a:lvl9pPr>
   </p:defaultTextStyle>
+  <p:extLst>
+    <p:ext uri="{EFAFB233-063F-42B5-8137-9DF3F51BA10A}">
+      <p15:sldGuideLst xmlns:p15="http://schemas.microsoft.com/office/powerpoint/2012/main"/>
+    </p:ext>
+  </p:extLst>
 </p:presentation>
 </file>
 
@@ -256,7 +263,7 @@
           <a:p>
             <a:fld id="{A03C0857-5E83-4ED7-8050-78E5F8A15FA7}" type="datetimeFigureOut">
               <a:rPr lang="ko-KR" altLang="en-US" smtClean="0"/>
-              <a:t>2025-09-02</a:t>
+              <a:t>2025-09-03</a:t>
             </a:fld>
             <a:endParaRPr lang="ko-KR" altLang="en-US"/>
           </a:p>
@@ -454,7 +461,7 @@
           <a:p>
             <a:fld id="{A03C0857-5E83-4ED7-8050-78E5F8A15FA7}" type="datetimeFigureOut">
               <a:rPr lang="ko-KR" altLang="en-US" smtClean="0"/>
-              <a:t>2025-09-02</a:t>
+              <a:t>2025-09-03</a:t>
             </a:fld>
             <a:endParaRPr lang="ko-KR" altLang="en-US"/>
           </a:p>
@@ -662,7 +669,7 @@
           <a:p>
             <a:fld id="{A03C0857-5E83-4ED7-8050-78E5F8A15FA7}" type="datetimeFigureOut">
               <a:rPr lang="ko-KR" altLang="en-US" smtClean="0"/>
-              <a:t>2025-09-02</a:t>
+              <a:t>2025-09-03</a:t>
             </a:fld>
             <a:endParaRPr lang="ko-KR" altLang="en-US"/>
           </a:p>
@@ -860,7 +867,7 @@
           <a:p>
             <a:fld id="{A03C0857-5E83-4ED7-8050-78E5F8A15FA7}" type="datetimeFigureOut">
               <a:rPr lang="ko-KR" altLang="en-US" smtClean="0"/>
-              <a:t>2025-09-02</a:t>
+              <a:t>2025-09-03</a:t>
             </a:fld>
             <a:endParaRPr lang="ko-KR" altLang="en-US"/>
           </a:p>
@@ -1135,7 +1142,7 @@
           <a:p>
             <a:fld id="{A03C0857-5E83-4ED7-8050-78E5F8A15FA7}" type="datetimeFigureOut">
               <a:rPr lang="ko-KR" altLang="en-US" smtClean="0"/>
-              <a:t>2025-09-02</a:t>
+              <a:t>2025-09-03</a:t>
             </a:fld>
             <a:endParaRPr lang="ko-KR" altLang="en-US"/>
           </a:p>
@@ -1400,7 +1407,7 @@
           <a:p>
             <a:fld id="{A03C0857-5E83-4ED7-8050-78E5F8A15FA7}" type="datetimeFigureOut">
               <a:rPr lang="ko-KR" altLang="en-US" smtClean="0"/>
-              <a:t>2025-09-02</a:t>
+              <a:t>2025-09-03</a:t>
             </a:fld>
             <a:endParaRPr lang="ko-KR" altLang="en-US"/>
           </a:p>
@@ -1812,7 +1819,7 @@
           <a:p>
             <a:fld id="{A03C0857-5E83-4ED7-8050-78E5F8A15FA7}" type="datetimeFigureOut">
               <a:rPr lang="ko-KR" altLang="en-US" smtClean="0"/>
-              <a:t>2025-09-02</a:t>
+              <a:t>2025-09-03</a:t>
             </a:fld>
             <a:endParaRPr lang="ko-KR" altLang="en-US"/>
           </a:p>
@@ -1953,7 +1960,7 @@
           <a:p>
             <a:fld id="{A03C0857-5E83-4ED7-8050-78E5F8A15FA7}" type="datetimeFigureOut">
               <a:rPr lang="ko-KR" altLang="en-US" smtClean="0"/>
-              <a:t>2025-09-02</a:t>
+              <a:t>2025-09-03</a:t>
             </a:fld>
             <a:endParaRPr lang="ko-KR" altLang="en-US"/>
           </a:p>
@@ -2066,7 +2073,7 @@
           <a:p>
             <a:fld id="{A03C0857-5E83-4ED7-8050-78E5F8A15FA7}" type="datetimeFigureOut">
               <a:rPr lang="ko-KR" altLang="en-US" smtClean="0"/>
-              <a:t>2025-09-02</a:t>
+              <a:t>2025-09-03</a:t>
             </a:fld>
             <a:endParaRPr lang="ko-KR" altLang="en-US"/>
           </a:p>
@@ -2377,7 +2384,7 @@
           <a:p>
             <a:fld id="{A03C0857-5E83-4ED7-8050-78E5F8A15FA7}" type="datetimeFigureOut">
               <a:rPr lang="ko-KR" altLang="en-US" smtClean="0"/>
-              <a:t>2025-09-02</a:t>
+              <a:t>2025-09-03</a:t>
             </a:fld>
             <a:endParaRPr lang="ko-KR" altLang="en-US"/>
           </a:p>
@@ -2665,7 +2672,7 @@
           <a:p>
             <a:fld id="{A03C0857-5E83-4ED7-8050-78E5F8A15FA7}" type="datetimeFigureOut">
               <a:rPr lang="ko-KR" altLang="en-US" smtClean="0"/>
-              <a:t>2025-09-02</a:t>
+              <a:t>2025-09-03</a:t>
             </a:fld>
             <a:endParaRPr lang="ko-KR" altLang="en-US"/>
           </a:p>
@@ -2906,7 +2913,7 @@
           <a:p>
             <a:fld id="{A03C0857-5E83-4ED7-8050-78E5F8A15FA7}" type="datetimeFigureOut">
               <a:rPr lang="ko-KR" altLang="en-US" smtClean="0"/>
-              <a:t>2025-09-02</a:t>
+              <a:t>2025-09-03</a:t>
             </a:fld>
             <a:endParaRPr lang="ko-KR" altLang="en-US"/>
           </a:p>
@@ -3344,7 +3351,10 @@
           <a:bodyPr/>
           <a:lstStyle/>
           <a:p>
-            <a:endParaRPr lang="ko-KR" altLang="en-US"/>
+            <a:r>
+              <a:rPr lang="ko-KR" altLang="en-US" dirty="0"/>
+              <a:t>개발환경 설치 매뉴얼</a:t>
+            </a:r>
           </a:p>
         </p:txBody>
       </p:sp>
@@ -3369,7 +3379,11 @@
           <a:bodyPr/>
           <a:lstStyle/>
           <a:p>
-            <a:endParaRPr lang="ko-KR" altLang="en-US"/>
+            <a:r>
+              <a:rPr lang="en-US" altLang="ko-KR"/>
+              <a:t>MariaDB v12.0.2</a:t>
+            </a:r>
+            <a:endParaRPr lang="ko-KR" altLang="en-US" dirty="0"/>
           </a:p>
         </p:txBody>
       </p:sp>
@@ -3408,7 +3422,7 @@
           <p:cNvPr id="2" name="제목 1">
             <a:extLst>
               <a:ext uri="{FF2B5EF4-FFF2-40B4-BE49-F238E27FC236}">
-                <a16:creationId xmlns:a16="http://schemas.microsoft.com/office/drawing/2014/main" id="{9D3298B3-C310-5404-4823-ACBECE7E76A6}"/>
+                <a16:creationId xmlns:a16="http://schemas.microsoft.com/office/drawing/2014/main" id="{21FEC82E-A496-0AF2-5531-4E9796D12EEB}"/>
               </a:ext>
             </a:extLst>
           </p:cNvPr>
@@ -3433,7 +3447,7 @@
           <p:cNvPr id="5" name="내용 개체 틀 4">
             <a:extLst>
               <a:ext uri="{FF2B5EF4-FFF2-40B4-BE49-F238E27FC236}">
-                <a16:creationId xmlns:a16="http://schemas.microsoft.com/office/drawing/2014/main" id="{DDA1ECC1-2CBF-6DFC-B014-23C5DD9517D7}"/>
+                <a16:creationId xmlns:a16="http://schemas.microsoft.com/office/drawing/2014/main" id="{A04FF003-528E-95C1-3DB1-106A084CE882}"/>
               </a:ext>
             </a:extLst>
           </p:cNvPr>
@@ -3452,8 +3466,8 @@
         </p:blipFill>
         <p:spPr>
           <a:xfrm>
-            <a:off x="2000422" y="1825625"/>
-            <a:ext cx="8191155" cy="4351338"/>
+            <a:off x="2014063" y="1825625"/>
+            <a:ext cx="8163873" cy="4351338"/>
           </a:xfrm>
           <a:prstGeom prst="rect">
             <a:avLst/>
@@ -3463,7 +3477,7 @@
     </p:spTree>
     <p:extLst>
       <p:ext uri="{BB962C8B-B14F-4D97-AF65-F5344CB8AC3E}">
-        <p14:creationId xmlns:p14="http://schemas.microsoft.com/office/powerpoint/2010/main" val="3200290644"/>
+        <p14:creationId xmlns:p14="http://schemas.microsoft.com/office/powerpoint/2010/main" val="2731477037"/>
       </p:ext>
     </p:extLst>
   </p:cSld>
@@ -3495,7 +3509,7 @@
           <p:cNvPr id="2" name="제목 1">
             <a:extLst>
               <a:ext uri="{FF2B5EF4-FFF2-40B4-BE49-F238E27FC236}">
-                <a16:creationId xmlns:a16="http://schemas.microsoft.com/office/drawing/2014/main" id="{21FEC82E-A496-0AF2-5531-4E9796D12EEB}"/>
+                <a16:creationId xmlns:a16="http://schemas.microsoft.com/office/drawing/2014/main" id="{8B010A81-34BC-7383-7AD0-6994751A1B25}"/>
               </a:ext>
             </a:extLst>
           </p:cNvPr>
@@ -3520,7 +3534,7 @@
           <p:cNvPr id="5" name="내용 개체 틀 4">
             <a:extLst>
               <a:ext uri="{FF2B5EF4-FFF2-40B4-BE49-F238E27FC236}">
-                <a16:creationId xmlns:a16="http://schemas.microsoft.com/office/drawing/2014/main" id="{A04FF003-528E-95C1-3DB1-106A084CE882}"/>
+                <a16:creationId xmlns:a16="http://schemas.microsoft.com/office/drawing/2014/main" id="{8B8AE760-6790-CA97-C648-009AD3F88B78}"/>
               </a:ext>
             </a:extLst>
           </p:cNvPr>
@@ -3539,8 +3553,8 @@
         </p:blipFill>
         <p:spPr>
           <a:xfrm>
-            <a:off x="2014063" y="1825625"/>
-            <a:ext cx="8163873" cy="4351338"/>
+            <a:off x="3307764" y="1825625"/>
+            <a:ext cx="5576471" cy="4351338"/>
           </a:xfrm>
           <a:prstGeom prst="rect">
             <a:avLst/>
@@ -3550,7 +3564,211 @@
     </p:spTree>
     <p:extLst>
       <p:ext uri="{BB962C8B-B14F-4D97-AF65-F5344CB8AC3E}">
-        <p14:creationId xmlns:p14="http://schemas.microsoft.com/office/powerpoint/2010/main" val="2731477037"/>
+        <p14:creationId xmlns:p14="http://schemas.microsoft.com/office/powerpoint/2010/main" val="3301649424"/>
+      </p:ext>
+    </p:extLst>
+  </p:cSld>
+  <p:clrMapOvr>
+    <a:masterClrMapping/>
+  </p:clrMapOvr>
+</p:sld>
+</file>
+
+<file path=ppt/slides/slide4.xml><?xml version="1.0" encoding="utf-8"?>
+<p:sld xmlns:a="http://schemas.openxmlformats.org/drawingml/2006/main" xmlns:r="http://schemas.openxmlformats.org/officeDocument/2006/relationships" xmlns:p="http://schemas.openxmlformats.org/presentationml/2006/main">
+  <p:cSld>
+    <p:spTree>
+      <p:nvGrpSpPr>
+        <p:cNvPr id="1" name=""/>
+        <p:cNvGrpSpPr/>
+        <p:nvPr/>
+      </p:nvGrpSpPr>
+      <p:grpSpPr>
+        <a:xfrm>
+          <a:off x="0" y="0"/>
+          <a:ext cx="0" cy="0"/>
+          <a:chOff x="0" y="0"/>
+          <a:chExt cx="0" cy="0"/>
+        </a:xfrm>
+      </p:grpSpPr>
+      <p:sp>
+        <p:nvSpPr>
+          <p:cNvPr id="2" name="제목 1">
+            <a:extLst>
+              <a:ext uri="{FF2B5EF4-FFF2-40B4-BE49-F238E27FC236}">
+                <a16:creationId xmlns:a16="http://schemas.microsoft.com/office/drawing/2014/main" id="{FBA4FD31-1F84-C155-D4D9-F96CEA1716B0}"/>
+              </a:ext>
+            </a:extLst>
+          </p:cNvPr>
+          <p:cNvSpPr>
+            <a:spLocks noGrp="1"/>
+          </p:cNvSpPr>
+          <p:nvPr>
+            <p:ph type="title"/>
+          </p:nvPr>
+        </p:nvSpPr>
+        <p:spPr/>
+        <p:txBody>
+          <a:bodyPr/>
+          <a:lstStyle/>
+          <a:p>
+            <a:endParaRPr lang="ko-KR" altLang="en-US"/>
+          </a:p>
+        </p:txBody>
+      </p:sp>
+      <p:pic>
+        <p:nvPicPr>
+          <p:cNvPr id="7" name="그림 6">
+            <a:extLst>
+              <a:ext uri="{FF2B5EF4-FFF2-40B4-BE49-F238E27FC236}">
+                <a16:creationId xmlns:a16="http://schemas.microsoft.com/office/drawing/2014/main" id="{2A1D3840-D986-56F9-EC2D-B00C3D5D5987}"/>
+              </a:ext>
+            </a:extLst>
+          </p:cNvPr>
+          <p:cNvPicPr>
+            <a:picLocks noChangeAspect="1"/>
+          </p:cNvPicPr>
+          <p:nvPr/>
+        </p:nvPicPr>
+        <p:blipFill>
+          <a:blip r:embed="rId2"/>
+          <a:stretch>
+            <a:fillRect/>
+          </a:stretch>
+        </p:blipFill>
+        <p:spPr>
+          <a:xfrm>
+            <a:off x="6357174" y="1825625"/>
+            <a:ext cx="4996626" cy="2505861"/>
+          </a:xfrm>
+          <a:prstGeom prst="rect">
+            <a:avLst/>
+          </a:prstGeom>
+        </p:spPr>
+      </p:pic>
+      <p:pic>
+        <p:nvPicPr>
+          <p:cNvPr id="11" name="내용 개체 틀 10">
+            <a:extLst>
+              <a:ext uri="{FF2B5EF4-FFF2-40B4-BE49-F238E27FC236}">
+                <a16:creationId xmlns:a16="http://schemas.microsoft.com/office/drawing/2014/main" id="{4279ED70-966E-F86D-BC35-D28479433A84}"/>
+              </a:ext>
+            </a:extLst>
+          </p:cNvPr>
+          <p:cNvPicPr>
+            <a:picLocks noGrp="1" noChangeAspect="1"/>
+          </p:cNvPicPr>
+          <p:nvPr>
+            <p:ph idx="1"/>
+          </p:nvPr>
+        </p:nvPicPr>
+        <p:blipFill>
+          <a:blip r:embed="rId3"/>
+          <a:stretch>
+            <a:fillRect/>
+          </a:stretch>
+        </p:blipFill>
+        <p:spPr>
+          <a:xfrm>
+            <a:off x="838200" y="1825625"/>
+            <a:ext cx="5548799" cy="4351338"/>
+          </a:xfrm>
+          <a:prstGeom prst="rect">
+            <a:avLst/>
+          </a:prstGeom>
+        </p:spPr>
+      </p:pic>
+    </p:spTree>
+    <p:extLst>
+      <p:ext uri="{BB962C8B-B14F-4D97-AF65-F5344CB8AC3E}">
+        <p14:creationId xmlns:p14="http://schemas.microsoft.com/office/powerpoint/2010/main" val="3390059577"/>
+      </p:ext>
+    </p:extLst>
+  </p:cSld>
+  <p:clrMapOvr>
+    <a:masterClrMapping/>
+  </p:clrMapOvr>
+</p:sld>
+</file>
+
+<file path=ppt/slides/slide5.xml><?xml version="1.0" encoding="utf-8"?>
+<p:sld xmlns:a="http://schemas.openxmlformats.org/drawingml/2006/main" xmlns:r="http://schemas.openxmlformats.org/officeDocument/2006/relationships" xmlns:p="http://schemas.openxmlformats.org/presentationml/2006/main">
+  <p:cSld>
+    <p:spTree>
+      <p:nvGrpSpPr>
+        <p:cNvPr id="1" name=""/>
+        <p:cNvGrpSpPr/>
+        <p:nvPr/>
+      </p:nvGrpSpPr>
+      <p:grpSpPr>
+        <a:xfrm>
+          <a:off x="0" y="0"/>
+          <a:ext cx="0" cy="0"/>
+          <a:chOff x="0" y="0"/>
+          <a:chExt cx="0" cy="0"/>
+        </a:xfrm>
+      </p:grpSpPr>
+      <p:sp>
+        <p:nvSpPr>
+          <p:cNvPr id="2" name="제목 1">
+            <a:extLst>
+              <a:ext uri="{FF2B5EF4-FFF2-40B4-BE49-F238E27FC236}">
+                <a16:creationId xmlns:a16="http://schemas.microsoft.com/office/drawing/2014/main" id="{481B9FC8-496E-2355-3348-F76AF17E16A5}"/>
+              </a:ext>
+            </a:extLst>
+          </p:cNvPr>
+          <p:cNvSpPr>
+            <a:spLocks noGrp="1"/>
+          </p:cNvSpPr>
+          <p:nvPr>
+            <p:ph type="title"/>
+          </p:nvPr>
+        </p:nvSpPr>
+        <p:spPr/>
+        <p:txBody>
+          <a:bodyPr/>
+          <a:lstStyle/>
+          <a:p>
+            <a:endParaRPr lang="ko-KR" altLang="en-US"/>
+          </a:p>
+        </p:txBody>
+      </p:sp>
+      <p:pic>
+        <p:nvPicPr>
+          <p:cNvPr id="5" name="내용 개체 틀 4">
+            <a:extLst>
+              <a:ext uri="{FF2B5EF4-FFF2-40B4-BE49-F238E27FC236}">
+                <a16:creationId xmlns:a16="http://schemas.microsoft.com/office/drawing/2014/main" id="{578160B8-1799-3B66-A005-62235446C1F5}"/>
+              </a:ext>
+            </a:extLst>
+          </p:cNvPr>
+          <p:cNvPicPr>
+            <a:picLocks noGrp="1" noChangeAspect="1"/>
+          </p:cNvPicPr>
+          <p:nvPr>
+            <p:ph idx="1"/>
+          </p:nvPr>
+        </p:nvPicPr>
+        <p:blipFill>
+          <a:blip r:embed="rId2"/>
+          <a:stretch>
+            <a:fillRect/>
+          </a:stretch>
+        </p:blipFill>
+        <p:spPr>
+          <a:xfrm>
+            <a:off x="3325061" y="1825625"/>
+            <a:ext cx="5541877" cy="4351338"/>
+          </a:xfrm>
+          <a:prstGeom prst="rect">
+            <a:avLst/>
+          </a:prstGeom>
+        </p:spPr>
+      </p:pic>
+    </p:spTree>
+    <p:extLst>
+      <p:ext uri="{BB962C8B-B14F-4D97-AF65-F5344CB8AC3E}">
+        <p14:creationId xmlns:p14="http://schemas.microsoft.com/office/powerpoint/2010/main" val="924065814"/>
       </p:ext>
     </p:extLst>
   </p:cSld>

--- a/doc/개발환경_설치매뉴얼(MariaDB).pptx
+++ b/doc/개발환경_설치매뉴얼(MariaDB).pptx
@@ -263,7 +263,7 @@
           <a:p>
             <a:fld id="{A03C0857-5E83-4ED7-8050-78E5F8A15FA7}" type="datetimeFigureOut">
               <a:rPr lang="ko-KR" altLang="en-US" smtClean="0"/>
-              <a:t>2025-09-03</a:t>
+              <a:t>2025-09-04</a:t>
             </a:fld>
             <a:endParaRPr lang="ko-KR" altLang="en-US"/>
           </a:p>
@@ -461,7 +461,7 @@
           <a:p>
             <a:fld id="{A03C0857-5E83-4ED7-8050-78E5F8A15FA7}" type="datetimeFigureOut">
               <a:rPr lang="ko-KR" altLang="en-US" smtClean="0"/>
-              <a:t>2025-09-03</a:t>
+              <a:t>2025-09-04</a:t>
             </a:fld>
             <a:endParaRPr lang="ko-KR" altLang="en-US"/>
           </a:p>
@@ -669,7 +669,7 @@
           <a:p>
             <a:fld id="{A03C0857-5E83-4ED7-8050-78E5F8A15FA7}" type="datetimeFigureOut">
               <a:rPr lang="ko-KR" altLang="en-US" smtClean="0"/>
-              <a:t>2025-09-03</a:t>
+              <a:t>2025-09-04</a:t>
             </a:fld>
             <a:endParaRPr lang="ko-KR" altLang="en-US"/>
           </a:p>
@@ -867,7 +867,7 @@
           <a:p>
             <a:fld id="{A03C0857-5E83-4ED7-8050-78E5F8A15FA7}" type="datetimeFigureOut">
               <a:rPr lang="ko-KR" altLang="en-US" smtClean="0"/>
-              <a:t>2025-09-03</a:t>
+              <a:t>2025-09-04</a:t>
             </a:fld>
             <a:endParaRPr lang="ko-KR" altLang="en-US"/>
           </a:p>
@@ -1142,7 +1142,7 @@
           <a:p>
             <a:fld id="{A03C0857-5E83-4ED7-8050-78E5F8A15FA7}" type="datetimeFigureOut">
               <a:rPr lang="ko-KR" altLang="en-US" smtClean="0"/>
-              <a:t>2025-09-03</a:t>
+              <a:t>2025-09-04</a:t>
             </a:fld>
             <a:endParaRPr lang="ko-KR" altLang="en-US"/>
           </a:p>
@@ -1407,7 +1407,7 @@
           <a:p>
             <a:fld id="{A03C0857-5E83-4ED7-8050-78E5F8A15FA7}" type="datetimeFigureOut">
               <a:rPr lang="ko-KR" altLang="en-US" smtClean="0"/>
-              <a:t>2025-09-03</a:t>
+              <a:t>2025-09-04</a:t>
             </a:fld>
             <a:endParaRPr lang="ko-KR" altLang="en-US"/>
           </a:p>
@@ -1819,7 +1819,7 @@
           <a:p>
             <a:fld id="{A03C0857-5E83-4ED7-8050-78E5F8A15FA7}" type="datetimeFigureOut">
               <a:rPr lang="ko-KR" altLang="en-US" smtClean="0"/>
-              <a:t>2025-09-03</a:t>
+              <a:t>2025-09-04</a:t>
             </a:fld>
             <a:endParaRPr lang="ko-KR" altLang="en-US"/>
           </a:p>
@@ -1960,7 +1960,7 @@
           <a:p>
             <a:fld id="{A03C0857-5E83-4ED7-8050-78E5F8A15FA7}" type="datetimeFigureOut">
               <a:rPr lang="ko-KR" altLang="en-US" smtClean="0"/>
-              <a:t>2025-09-03</a:t>
+              <a:t>2025-09-04</a:t>
             </a:fld>
             <a:endParaRPr lang="ko-KR" altLang="en-US"/>
           </a:p>
@@ -2073,7 +2073,7 @@
           <a:p>
             <a:fld id="{A03C0857-5E83-4ED7-8050-78E5F8A15FA7}" type="datetimeFigureOut">
               <a:rPr lang="ko-KR" altLang="en-US" smtClean="0"/>
-              <a:t>2025-09-03</a:t>
+              <a:t>2025-09-04</a:t>
             </a:fld>
             <a:endParaRPr lang="ko-KR" altLang="en-US"/>
           </a:p>
@@ -2384,7 +2384,7 @@
           <a:p>
             <a:fld id="{A03C0857-5E83-4ED7-8050-78E5F8A15FA7}" type="datetimeFigureOut">
               <a:rPr lang="ko-KR" altLang="en-US" smtClean="0"/>
-              <a:t>2025-09-03</a:t>
+              <a:t>2025-09-04</a:t>
             </a:fld>
             <a:endParaRPr lang="ko-KR" altLang="en-US"/>
           </a:p>
@@ -2672,7 +2672,7 @@
           <a:p>
             <a:fld id="{A03C0857-5E83-4ED7-8050-78E5F8A15FA7}" type="datetimeFigureOut">
               <a:rPr lang="ko-KR" altLang="en-US" smtClean="0"/>
-              <a:t>2025-09-03</a:t>
+              <a:t>2025-09-04</a:t>
             </a:fld>
             <a:endParaRPr lang="ko-KR" altLang="en-US"/>
           </a:p>
@@ -2913,7 +2913,7 @@
           <a:p>
             <a:fld id="{A03C0857-5E83-4ED7-8050-78E5F8A15FA7}" type="datetimeFigureOut">
               <a:rPr lang="ko-KR" altLang="en-US" smtClean="0"/>
-              <a:t>2025-09-03</a:t>
+              <a:t>2025-09-04</a:t>
             </a:fld>
             <a:endParaRPr lang="ko-KR" altLang="en-US"/>
           </a:p>
@@ -3678,6 +3678,162 @@
           </a:prstGeom>
         </p:spPr>
       </p:pic>
+      <p:sp>
+        <p:nvSpPr>
+          <p:cNvPr id="3" name="직사각형 2">
+            <a:extLst>
+              <a:ext uri="{FF2B5EF4-FFF2-40B4-BE49-F238E27FC236}">
+                <a16:creationId xmlns:a16="http://schemas.microsoft.com/office/drawing/2014/main" id="{FF33F107-A06A-092D-20F4-4D31767A37C1}"/>
+              </a:ext>
+            </a:extLst>
+          </p:cNvPr>
+          <p:cNvSpPr/>
+          <p:nvPr/>
+        </p:nvSpPr>
+        <p:spPr>
+          <a:xfrm>
+            <a:off x="1117600" y="4483100"/>
+            <a:ext cx="5060950" cy="609600"/>
+          </a:xfrm>
+          <a:prstGeom prst="rect">
+            <a:avLst/>
+          </a:prstGeom>
+          <a:noFill/>
+          <a:ln>
+            <a:solidFill>
+              <a:srgbClr val="FF0000"/>
+            </a:solidFill>
+          </a:ln>
+        </p:spPr>
+        <p:style>
+          <a:lnRef idx="2">
+            <a:schemeClr val="accent1">
+              <a:shade val="15000"/>
+            </a:schemeClr>
+          </a:lnRef>
+          <a:fillRef idx="1">
+            <a:schemeClr val="accent1"/>
+          </a:fillRef>
+          <a:effectRef idx="0">
+            <a:schemeClr val="accent1"/>
+          </a:effectRef>
+          <a:fontRef idx="minor">
+            <a:schemeClr val="lt1"/>
+          </a:fontRef>
+        </p:style>
+        <p:txBody>
+          <a:bodyPr rtlCol="0" anchor="ctr"/>
+          <a:lstStyle/>
+          <a:p>
+            <a:pPr algn="ctr"/>
+            <a:endParaRPr lang="ko-KR" altLang="en-US"/>
+          </a:p>
+        </p:txBody>
+      </p:sp>
+      <p:sp>
+        <p:nvSpPr>
+          <p:cNvPr id="4" name="직사각형 3">
+            <a:extLst>
+              <a:ext uri="{FF2B5EF4-FFF2-40B4-BE49-F238E27FC236}">
+                <a16:creationId xmlns:a16="http://schemas.microsoft.com/office/drawing/2014/main" id="{68445D05-98C0-B7D9-3901-619E7997360B}"/>
+              </a:ext>
+            </a:extLst>
+          </p:cNvPr>
+          <p:cNvSpPr/>
+          <p:nvPr/>
+        </p:nvSpPr>
+        <p:spPr>
+          <a:xfrm>
+            <a:off x="1117600" y="3321050"/>
+            <a:ext cx="5060950" cy="317500"/>
+          </a:xfrm>
+          <a:prstGeom prst="rect">
+            <a:avLst/>
+          </a:prstGeom>
+          <a:noFill/>
+          <a:ln>
+            <a:solidFill>
+              <a:srgbClr val="FF0000"/>
+            </a:solidFill>
+          </a:ln>
+        </p:spPr>
+        <p:style>
+          <a:lnRef idx="2">
+            <a:schemeClr val="accent1">
+              <a:shade val="15000"/>
+            </a:schemeClr>
+          </a:lnRef>
+          <a:fillRef idx="1">
+            <a:schemeClr val="accent1"/>
+          </a:fillRef>
+          <a:effectRef idx="0">
+            <a:schemeClr val="accent1"/>
+          </a:effectRef>
+          <a:fontRef idx="minor">
+            <a:schemeClr val="lt1"/>
+          </a:fontRef>
+        </p:style>
+        <p:txBody>
+          <a:bodyPr rtlCol="0" anchor="ctr"/>
+          <a:lstStyle/>
+          <a:p>
+            <a:pPr algn="ctr"/>
+            <a:endParaRPr lang="ko-KR" altLang="en-US"/>
+          </a:p>
+        </p:txBody>
+      </p:sp>
+      <p:sp>
+        <p:nvSpPr>
+          <p:cNvPr id="5" name="직사각형 4">
+            <a:extLst>
+              <a:ext uri="{FF2B5EF4-FFF2-40B4-BE49-F238E27FC236}">
+                <a16:creationId xmlns:a16="http://schemas.microsoft.com/office/drawing/2014/main" id="{2A64A483-DE4A-AEF0-C376-891527BDC02E}"/>
+              </a:ext>
+            </a:extLst>
+          </p:cNvPr>
+          <p:cNvSpPr/>
+          <p:nvPr/>
+        </p:nvSpPr>
+        <p:spPr>
+          <a:xfrm>
+            <a:off x="6584673" y="3530600"/>
+            <a:ext cx="3175277" cy="508000"/>
+          </a:xfrm>
+          <a:prstGeom prst="rect">
+            <a:avLst/>
+          </a:prstGeom>
+          <a:noFill/>
+          <a:ln>
+            <a:solidFill>
+              <a:srgbClr val="FF0000"/>
+            </a:solidFill>
+          </a:ln>
+        </p:spPr>
+        <p:style>
+          <a:lnRef idx="2">
+            <a:schemeClr val="accent1">
+              <a:shade val="15000"/>
+            </a:schemeClr>
+          </a:lnRef>
+          <a:fillRef idx="1">
+            <a:schemeClr val="accent1"/>
+          </a:fillRef>
+          <a:effectRef idx="0">
+            <a:schemeClr val="accent1"/>
+          </a:effectRef>
+          <a:fontRef idx="minor">
+            <a:schemeClr val="lt1"/>
+          </a:fontRef>
+        </p:style>
+        <p:txBody>
+          <a:bodyPr rtlCol="0" anchor="ctr"/>
+          <a:lstStyle/>
+          <a:p>
+            <a:pPr algn="ctr"/>
+            <a:endParaRPr lang="ko-KR" altLang="en-US"/>
+          </a:p>
+        </p:txBody>
+      </p:sp>
     </p:spTree>
     <p:extLst>
       <p:ext uri="{BB962C8B-B14F-4D97-AF65-F5344CB8AC3E}">
